--- a/AI-tools.pptx
+++ b/AI-tools.pptx
@@ -719,7 +719,7 @@
         </p:nvSpPr>
         <p:spPr>
           <a:xfrm>
-            <a:off x="381300" y="685800"/>
+            <a:off x="381000" y="685800"/>
             <a:ext cx="6096000" cy="3429000"/>
           </a:xfrm>
           <a:custGeom>
@@ -11088,8 +11088,8 @@
         </p:nvSpPr>
         <p:spPr>
           <a:xfrm>
-            <a:off x="7816800" y="3424600"/>
-            <a:ext cx="1275300" cy="1496100"/>
+            <a:off x="7078475" y="3424600"/>
+            <a:ext cx="2013625" cy="1680422"/>
           </a:xfrm>
           <a:prstGeom prst="rect">
             <a:avLst/>
@@ -11128,7 +11128,7 @@
               <a:buNone/>
             </a:pPr>
             <a:r>
-              <a:rPr lang="en" sz="1200" b="1">
+              <a:rPr lang="en" sz="1200" b="1" dirty="0">
                 <a:solidFill>
                   <a:srgbClr val="FF0000"/>
                 </a:solidFill>
@@ -11139,7 +11139,7 @@
               </a:rPr>
               <a:t>Local Apps:</a:t>
             </a:r>
-            <a:endParaRPr sz="1200">
+            <a:endParaRPr sz="1200" dirty="0">
               <a:solidFill>
                 <a:schemeClr val="dk1"/>
               </a:solidFill>
@@ -11160,7 +11160,7 @@
               <a:buNone/>
             </a:pPr>
             <a:r>
-              <a:rPr lang="en" sz="1200">
+              <a:rPr lang="en" sz="1200" dirty="0">
                 <a:solidFill>
                   <a:schemeClr val="dk1"/>
                 </a:solidFill>
@@ -11169,9 +11169,21 @@
                 <a:cs typeface="Calibri"/>
                 <a:sym typeface="Calibri"/>
               </a:rPr>
-              <a:t>.. Ollama</a:t>
+              <a:t>.. </a:t>
             </a:r>
-            <a:endParaRPr sz="1200">
+            <a:r>
+              <a:rPr lang="en" sz="1200" dirty="0" err="1">
+                <a:solidFill>
+                  <a:schemeClr val="dk1"/>
+                </a:solidFill>
+                <a:latin typeface="Calibri"/>
+                <a:ea typeface="Calibri"/>
+                <a:cs typeface="Calibri"/>
+                <a:sym typeface="Calibri"/>
+              </a:rPr>
+              <a:t>Ollama</a:t>
+            </a:r>
+            <a:endParaRPr sz="1200" dirty="0">
               <a:solidFill>
                 <a:schemeClr val="dk1"/>
               </a:solidFill>
@@ -11192,7 +11204,7 @@
               <a:buNone/>
             </a:pPr>
             <a:r>
-              <a:rPr lang="en" sz="1200">
+              <a:rPr lang="en" sz="1200" dirty="0">
                 <a:solidFill>
                   <a:schemeClr val="dk1"/>
                 </a:solidFill>
@@ -11201,9 +11213,21 @@
                 <a:cs typeface="Calibri"/>
                 <a:sym typeface="Calibri"/>
               </a:rPr>
-              <a:t>.. LMStudio</a:t>
+              <a:t>.. </a:t>
             </a:r>
-            <a:endParaRPr sz="1200">
+            <a:r>
+              <a:rPr lang="en" sz="1200" dirty="0" err="1">
+                <a:solidFill>
+                  <a:schemeClr val="dk1"/>
+                </a:solidFill>
+                <a:latin typeface="Calibri"/>
+                <a:ea typeface="Calibri"/>
+                <a:cs typeface="Calibri"/>
+                <a:sym typeface="Calibri"/>
+              </a:rPr>
+              <a:t>LMStudio</a:t>
+            </a:r>
+            <a:endParaRPr sz="1200" dirty="0">
               <a:solidFill>
                 <a:schemeClr val="dk1"/>
               </a:solidFill>
@@ -11224,7 +11248,7 @@
               <a:buNone/>
             </a:pPr>
             <a:r>
-              <a:rPr lang="en" sz="1200">
+              <a:rPr lang="en" sz="1200" dirty="0">
                 <a:solidFill>
                   <a:schemeClr val="dk1"/>
                 </a:solidFill>
@@ -11233,9 +11257,45 @@
                 <a:cs typeface="Calibri"/>
                 <a:sym typeface="Calibri"/>
               </a:rPr>
-              <a:t>.. TextGen WebUI</a:t>
+              <a:t>.. </a:t>
             </a:r>
-            <a:endParaRPr sz="1200">
+            <a:r>
+              <a:rPr lang="en" sz="1200" dirty="0" err="1">
+                <a:solidFill>
+                  <a:schemeClr val="dk1"/>
+                </a:solidFill>
+                <a:latin typeface="Calibri"/>
+                <a:ea typeface="Calibri"/>
+                <a:cs typeface="Calibri"/>
+                <a:sym typeface="Calibri"/>
+              </a:rPr>
+              <a:t>TextGen</a:t>
+            </a:r>
+            <a:r>
+              <a:rPr lang="en" sz="1200" dirty="0">
+                <a:solidFill>
+                  <a:schemeClr val="dk1"/>
+                </a:solidFill>
+                <a:latin typeface="Calibri"/>
+                <a:ea typeface="Calibri"/>
+                <a:cs typeface="Calibri"/>
+                <a:sym typeface="Calibri"/>
+              </a:rPr>
+              <a:t> </a:t>
+            </a:r>
+            <a:r>
+              <a:rPr lang="en" sz="1200" dirty="0" err="1">
+                <a:solidFill>
+                  <a:schemeClr val="dk1"/>
+                </a:solidFill>
+                <a:latin typeface="Calibri"/>
+                <a:ea typeface="Calibri"/>
+                <a:cs typeface="Calibri"/>
+                <a:sym typeface="Calibri"/>
+              </a:rPr>
+              <a:t>WebUI</a:t>
+            </a:r>
+            <a:endParaRPr sz="1200" dirty="0">
               <a:solidFill>
                 <a:schemeClr val="dk1"/>
               </a:solidFill>
@@ -11256,7 +11316,7 @@
               <a:buNone/>
             </a:pPr>
             <a:r>
-              <a:rPr lang="en" sz="1200">
+              <a:rPr lang="en" sz="1200" dirty="0">
                 <a:solidFill>
                   <a:schemeClr val="dk1"/>
                 </a:solidFill>
@@ -11267,7 +11327,7 @@
               </a:rPr>
               <a:t>.. GPT4All</a:t>
             </a:r>
-            <a:endParaRPr sz="1200">
+            <a:endParaRPr sz="1200" dirty="0">
               <a:solidFill>
                 <a:schemeClr val="dk1"/>
               </a:solidFill>
@@ -11288,7 +11348,7 @@
               <a:buNone/>
             </a:pPr>
             <a:r>
-              <a:rPr lang="en" sz="1200">
+              <a:rPr lang="en" sz="1200" dirty="0">
                 <a:solidFill>
                   <a:schemeClr val="dk1"/>
                 </a:solidFill>
@@ -11299,7 +11359,7 @@
               </a:rPr>
               <a:t>.. MLC LLM</a:t>
             </a:r>
-            <a:endParaRPr sz="1200">
+            <a:endParaRPr sz="1200" dirty="0">
               <a:solidFill>
                 <a:schemeClr val="dk1"/>
               </a:solidFill>
@@ -11320,7 +11380,7 @@
               <a:buNone/>
             </a:pPr>
             <a:r>
-              <a:rPr lang="en" sz="1200">
+              <a:rPr lang="en" sz="1200" dirty="0">
                 <a:solidFill>
                   <a:schemeClr val="dk1"/>
                 </a:solidFill>
@@ -11329,9 +11389,21 @@
                 <a:cs typeface="Calibri"/>
                 <a:sym typeface="Calibri"/>
               </a:rPr>
-              <a:t>.. PrivateGPT</a:t>
+              <a:t>.. </a:t>
             </a:r>
-            <a:endParaRPr sz="1200">
+            <a:r>
+              <a:rPr lang="en" sz="1200" dirty="0" err="1">
+                <a:solidFill>
+                  <a:schemeClr val="dk1"/>
+                </a:solidFill>
+                <a:latin typeface="Calibri"/>
+                <a:ea typeface="Calibri"/>
+                <a:cs typeface="Calibri"/>
+                <a:sym typeface="Calibri"/>
+              </a:rPr>
+              <a:t>PrivateGPT</a:t>
+            </a:r>
+            <a:endParaRPr sz="1200" dirty="0">
               <a:solidFill>
                 <a:schemeClr val="dk1"/>
               </a:solidFill>
@@ -11352,7 +11424,7 @@
               <a:buNone/>
             </a:pPr>
             <a:r>
-              <a:rPr lang="en" sz="1200">
+              <a:rPr lang="en" sz="1200" dirty="0">
                 <a:solidFill>
                   <a:schemeClr val="dk1"/>
                 </a:solidFill>
@@ -11363,7 +11435,102 @@
               </a:rPr>
               <a:t>.. h2oGPT</a:t>
             </a:r>
-            <a:endParaRPr sz="1200">
+          </a:p>
+          <a:p>
+            <a:pPr marL="0" lvl="0" indent="0" algn="l" rtl="0">
+              <a:spcBef>
+                <a:spcPts val="0"/>
+              </a:spcBef>
+              <a:spcAft>
+                <a:spcPts val="0"/>
+              </a:spcAft>
+              <a:buNone/>
+            </a:pPr>
+            <a:r>
+              <a:rPr lang="en" sz="1200" dirty="0">
+                <a:solidFill>
+                  <a:schemeClr val="dk1"/>
+                </a:solidFill>
+                <a:latin typeface="Calibri"/>
+                <a:ea typeface="Calibri"/>
+                <a:cs typeface="Calibri"/>
+                <a:sym typeface="Calibri"/>
+              </a:rPr>
+              <a:t>.. Jan(</a:t>
+            </a:r>
+            <a:r>
+              <a:rPr lang="en-US" sz="1200" dirty="0" err="1">
+                <a:solidFill>
+                  <a:schemeClr val="dk1"/>
+                </a:solidFill>
+                <a:latin typeface="Calibri"/>
+                <a:ea typeface="Calibri"/>
+                <a:cs typeface="Calibri"/>
+                <a:sym typeface="Calibri"/>
+              </a:rPr>
+              <a:t>github.com</a:t>
+            </a:r>
+            <a:r>
+              <a:rPr lang="en-US" sz="1200" dirty="0">
+                <a:solidFill>
+                  <a:schemeClr val="dk1"/>
+                </a:solidFill>
+                <a:latin typeface="Calibri"/>
+                <a:ea typeface="Calibri"/>
+                <a:cs typeface="Calibri"/>
+                <a:sym typeface="Calibri"/>
+              </a:rPr>
+              <a:t>/</a:t>
+            </a:r>
+            <a:r>
+              <a:rPr lang="en-US" sz="1200" dirty="0" err="1">
+                <a:solidFill>
+                  <a:schemeClr val="dk1"/>
+                </a:solidFill>
+                <a:latin typeface="Calibri"/>
+                <a:ea typeface="Calibri"/>
+                <a:cs typeface="Calibri"/>
+                <a:sym typeface="Calibri"/>
+              </a:rPr>
+              <a:t>janhq</a:t>
+            </a:r>
+            <a:r>
+              <a:rPr lang="en-US" sz="1200" dirty="0">
+                <a:solidFill>
+                  <a:schemeClr val="dk1"/>
+                </a:solidFill>
+                <a:latin typeface="Calibri"/>
+                <a:ea typeface="Calibri"/>
+                <a:cs typeface="Calibri"/>
+                <a:sym typeface="Calibri"/>
+              </a:rPr>
+              <a:t>/</a:t>
+            </a:r>
+            <a:r>
+              <a:rPr lang="en-US" sz="1200" dirty="0" err="1">
+                <a:solidFill>
+                  <a:schemeClr val="dk1"/>
+                </a:solidFill>
+                <a:latin typeface="Calibri"/>
+                <a:ea typeface="Calibri"/>
+                <a:cs typeface="Calibri"/>
+                <a:sym typeface="Calibri"/>
+              </a:rPr>
+              <a:t>jan</a:t>
+            </a:r>
+            <a:r>
+              <a:rPr lang="en-US" sz="1200" dirty="0">
+                <a:solidFill>
+                  <a:schemeClr val="dk1"/>
+                </a:solidFill>
+                <a:latin typeface="Calibri"/>
+                <a:ea typeface="Calibri"/>
+                <a:cs typeface="Calibri"/>
+                <a:sym typeface="Calibri"/>
+              </a:rPr>
+              <a:t>)</a:t>
+            </a:r>
+            <a:endParaRPr sz="1200" dirty="0">
               <a:solidFill>
                 <a:schemeClr val="dk1"/>
               </a:solidFill>
